--- a/site/clases/parte-2-deep-learning/118-tensorflow-tensores-variables-operaciones/clase-118-tensorflow-tensores-variables-operaciones-presentacion.pptx
+++ b/site/clases/parte-2-deep-learning/118-tensorflow-tensores-variables-operaciones/clase-118-tensorflow-tensores-variables-operaciones-presentacion.pptx
@@ -3272,7 +3272,7 @@
                 </a:solidFill>
                 <a:latin typeface="Segoe UI"/>
               </a:rPr>
-              <a:t>Parte: 2 — Deep Learning · Fuente: Géron, cap. 12 § Using TensorFlow like NumPy.  Duración estimada: 60 min.</a:t>
+              <a:t>Parte: 2 — Deep Learning · Fuente: Géron, cap. 12 § Using TensorFlow like NumPy.  Duración estimada: 60 min. · Nivel: Avanzado</a:t>
             </a:r>
           </a:p>
         </p:txBody>
@@ -3581,7 +3581,7 @@
                 </a:solidFill>
                 <a:latin typeface="Segoe UI"/>
               </a:rPr>
-              <a:t>Parte: 2 — Deep Learning · Fuente: Géron, cap. 12 § Using TensorFlow like NumPy.  Duración estimada: 60 min.</a:t>
+              <a:t>Parte: 2 — Deep Learning · Fuente: Géron, cap. 12 § Using TensorFlow like NumPy.  Duración estimada: 60 min. · Nivel: Avanzado</a:t>
             </a:r>
           </a:p>
         </p:txBody>
@@ -4910,7 +4910,216 @@
                 </a:solidFill>
                 <a:latin typeface="Courier New"/>
               </a:rPr>
-              <a:t># Imports y configuración inicial</a:t>
+              <a:t>import numpy as np</a:t>
+            </a:r>
+          </a:p>
+          <a:p>
+            <a:pPr>
+              <a:defRPr sz="1200" b="0">
+                <a:solidFill>
+                  <a:srgbClr val="F8FAFC"/>
+                </a:solidFill>
+                <a:latin typeface="Courier New"/>
+              </a:defRPr>
+            </a:pPr>
+            <a:r>
+              <a:rPr sz="1200" b="0">
+                <a:solidFill>
+                  <a:srgbClr val="F8FAFC"/>
+                </a:solidFill>
+                <a:latin typeface="Courier New"/>
+              </a:rPr>
+              <a:t>import tensorflow as tf</a:t>
+            </a:r>
+          </a:p>
+          <a:p>
+            <a:pPr>
+              <a:defRPr sz="1200" b="0">
+                <a:solidFill>
+                  <a:srgbClr val="F8FAFC"/>
+                </a:solidFill>
+                <a:latin typeface="Courier New"/>
+              </a:defRPr>
+            </a:pPr>
+            <a:r>
+              <a:rPr sz="1200" b="0">
+                <a:solidFill>
+                  <a:srgbClr val="F8FAFC"/>
+                </a:solidFill>
+                <a:latin typeface="Courier New"/>
+              </a:rPr>
+              <a:t>tf.random.set_seed(42)</a:t>
+            </a:r>
+          </a:p>
+          <a:p>
+            <a:pPr>
+              <a:defRPr sz="1200" b="0">
+                <a:solidFill>
+                  <a:srgbClr val="F8FAFC"/>
+                </a:solidFill>
+                <a:latin typeface="Courier New"/>
+              </a:defRPr>
+            </a:pPr>
+            <a:r>
+              <a:rPr sz="1200" b="0">
+                <a:solidFill>
+                  <a:srgbClr val="F8FAFC"/>
+                </a:solidFill>
+                <a:latin typeface="Courier New"/>
+              </a:rPr>
+              <a:t> </a:t>
+            </a:r>
+          </a:p>
+          <a:p>
+            <a:pPr>
+              <a:defRPr sz="1200" b="0">
+                <a:solidFill>
+                  <a:srgbClr val="F8FAFC"/>
+                </a:solidFill>
+                <a:latin typeface="Courier New"/>
+              </a:defRPr>
+            </a:pPr>
+            <a:r>
+              <a:rPr sz="1200" b="0">
+                <a:solidFill>
+                  <a:srgbClr val="F8FAFC"/>
+                </a:solidFill>
+                <a:latin typeface="Courier New"/>
+              </a:rPr>
+              <a:t>t = tf.constant([[1.0, 2.0], [3.0, 4.0]])</a:t>
+            </a:r>
+          </a:p>
+          <a:p>
+            <a:pPr>
+              <a:defRPr sz="1200" b="0">
+                <a:solidFill>
+                  <a:srgbClr val="F8FAFC"/>
+                </a:solidFill>
+                <a:latin typeface="Courier New"/>
+              </a:defRPr>
+            </a:pPr>
+            <a:r>
+              <a:rPr sz="1200" b="0">
+                <a:solidFill>
+                  <a:srgbClr val="F8FAFC"/>
+                </a:solidFill>
+                <a:latin typeface="Courier New"/>
+              </a:rPr>
+              <a:t>ceros = tf.zeros((2, 3))</a:t>
+            </a:r>
+          </a:p>
+          <a:p>
+            <a:pPr>
+              <a:defRPr sz="1200" b="0">
+                <a:solidFill>
+                  <a:srgbClr val="F8FAFC"/>
+                </a:solidFill>
+                <a:latin typeface="Courier New"/>
+              </a:defRPr>
+            </a:pPr>
+            <a:r>
+              <a:rPr sz="1200" b="0">
+                <a:solidFill>
+                  <a:srgbClr val="F8FAFC"/>
+                </a:solidFill>
+                <a:latin typeface="Courier New"/>
+              </a:rPr>
+              <a:t>unos = tf.ones((2, 3))</a:t>
+            </a:r>
+          </a:p>
+          <a:p>
+            <a:pPr>
+              <a:defRPr sz="1200" b="0">
+                <a:solidFill>
+                  <a:srgbClr val="F8FAFC"/>
+                </a:solidFill>
+                <a:latin typeface="Courier New"/>
+              </a:defRPr>
+            </a:pPr>
+            <a:r>
+              <a:rPr sz="1200" b="0">
+                <a:solidFill>
+                  <a:srgbClr val="F8FAFC"/>
+                </a:solidFill>
+                <a:latin typeface="Courier New"/>
+              </a:rPr>
+              <a:t>aleatorio = tf.random.normal((2, 2), mean=0.0, stddev=1.0)</a:t>
+            </a:r>
+          </a:p>
+          <a:p>
+            <a:pPr>
+              <a:defRPr sz="1200" b="0">
+                <a:solidFill>
+                  <a:srgbClr val="F8FAFC"/>
+                </a:solidFill>
+                <a:latin typeface="Courier New"/>
+              </a:defRPr>
+            </a:pPr>
+            <a:r>
+              <a:rPr sz="1200" b="0">
+                <a:solidFill>
+                  <a:srgbClr val="F8FAFC"/>
+                </a:solidFill>
+                <a:latin typeface="Courier New"/>
+              </a:rPr>
+              <a:t> </a:t>
+            </a:r>
+          </a:p>
+          <a:p>
+            <a:pPr>
+              <a:defRPr sz="1200" b="0">
+                <a:solidFill>
+                  <a:srgbClr val="F8FAFC"/>
+                </a:solidFill>
+                <a:latin typeface="Courier New"/>
+              </a:defRPr>
+            </a:pPr>
+            <a:r>
+              <a:rPr sz="1200" b="0">
+                <a:solidFill>
+                  <a:srgbClr val="F8FAFC"/>
+                </a:solidFill>
+                <a:latin typeface="Courier New"/>
+              </a:rPr>
+              <a:t>print("t =\n", t.numpy())</a:t>
+            </a:r>
+          </a:p>
+          <a:p>
+            <a:pPr>
+              <a:defRPr sz="1200" b="0">
+                <a:solidFill>
+                  <a:srgbClr val="F8FAFC"/>
+                </a:solidFill>
+                <a:latin typeface="Courier New"/>
+              </a:defRPr>
+            </a:pPr>
+            <a:r>
+              <a:rPr sz="1200" b="0">
+                <a:solidFill>
+                  <a:srgbClr val="F8FAFC"/>
+                </a:solidFill>
+                <a:latin typeface="Courier New"/>
+              </a:rPr>
+              <a:t>print("shape:", t.shape, "| dtype:", t.dtype)</a:t>
+            </a:r>
+          </a:p>
+          <a:p>
+            <a:pPr>
+              <a:defRPr sz="1200" b="0">
+                <a:solidFill>
+                  <a:srgbClr val="F8FAFC"/>
+                </a:solidFill>
+                <a:latin typeface="Courier New"/>
+              </a:defRPr>
+            </a:pPr>
+            <a:r>
+              <a:rPr sz="1200" b="0">
+                <a:solidFill>
+                  <a:srgbClr val="F8FAFC"/>
+                </a:solidFill>
+                <a:latin typeface="Courier New"/>
+              </a:rPr>
+              <a:t>print("aleatorio ~N(0,1):\n", aleatorio.numpy())</a:t>
             </a:r>
           </a:p>
         </p:txBody>
